--- a/slides/Tcoki Slidedeck.pptx
+++ b/slides/Tcoki Slidedeck.pptx
@@ -904,7 +904,7 @@
   <p:cSld>
     <p:spTree>
       <p:nvGrpSpPr>
-        <p:cNvPr id="70" name="Shape 70"/>
+        <p:cNvPr id="73" name="Shape 73"/>
         <p:cNvGrpSpPr/>
         <p:nvPr/>
       </p:nvGrpSpPr>
@@ -918,7 +918,7 @@
       </p:grpSpPr>
       <p:sp>
         <p:nvSpPr>
-          <p:cNvPr id="71" name="Google Shape;71;g28953c4cc47_1_2:notes"/>
+          <p:cNvPr id="74" name="Google Shape;74;g28953c4cc47_1_2:notes"/>
           <p:cNvSpPr/>
           <p:nvPr>
             <p:ph idx="2" type="sldImg"/>
@@ -953,7 +953,7 @@
       </p:sp>
       <p:sp>
         <p:nvSpPr>
-          <p:cNvPr id="72" name="Google Shape;72;g28953c4cc47_1_2:notes"/>
+          <p:cNvPr id="75" name="Google Shape;75;g28953c4cc47_1_2:notes"/>
           <p:cNvSpPr txBox="1"/>
           <p:nvPr>
             <p:ph idx="1" type="body"/>
@@ -1003,7 +1003,7 @@
   <p:cSld>
     <p:spTree>
       <p:nvGrpSpPr>
-        <p:cNvPr id="82" name="Shape 82"/>
+        <p:cNvPr id="85" name="Shape 85"/>
         <p:cNvGrpSpPr/>
         <p:nvPr/>
       </p:nvGrpSpPr>
@@ -1017,7 +1017,7 @@
       </p:grpSpPr>
       <p:sp>
         <p:nvSpPr>
-          <p:cNvPr id="83" name="Google Shape;83;g28937635197_1_23:notes"/>
+          <p:cNvPr id="86" name="Google Shape;86;g28937635197_1_23:notes"/>
           <p:cNvSpPr/>
           <p:nvPr>
             <p:ph idx="2" type="sldImg"/>
@@ -1052,7 +1052,7 @@
       </p:sp>
       <p:sp>
         <p:nvSpPr>
-          <p:cNvPr id="84" name="Google Shape;84;g28937635197_1_23:notes"/>
+          <p:cNvPr id="87" name="Google Shape;87;g28937635197_1_23:notes"/>
           <p:cNvSpPr txBox="1"/>
           <p:nvPr>
             <p:ph idx="1" type="body"/>
@@ -1102,7 +1102,7 @@
   <p:cSld>
     <p:spTree>
       <p:nvGrpSpPr>
-        <p:cNvPr id="89" name="Shape 89"/>
+        <p:cNvPr id="92" name="Shape 92"/>
         <p:cNvGrpSpPr/>
         <p:nvPr/>
       </p:nvGrpSpPr>
@@ -1116,7 +1116,7 @@
       </p:grpSpPr>
       <p:sp>
         <p:nvSpPr>
-          <p:cNvPr id="90" name="Google Shape;90;g28953c4cc47_1_23:notes"/>
+          <p:cNvPr id="93" name="Google Shape;93;g28953c4cc47_1_23:notes"/>
           <p:cNvSpPr/>
           <p:nvPr>
             <p:ph idx="2" type="sldImg"/>
@@ -1151,7 +1151,7 @@
       </p:sp>
       <p:sp>
         <p:nvSpPr>
-          <p:cNvPr id="91" name="Google Shape;91;g28953c4cc47_1_23:notes"/>
+          <p:cNvPr id="94" name="Google Shape;94;g28953c4cc47_1_23:notes"/>
           <p:cNvSpPr txBox="1"/>
           <p:nvPr>
             <p:ph idx="1" type="body"/>
@@ -1201,7 +1201,7 @@
   <p:cSld>
     <p:spTree>
       <p:nvGrpSpPr>
-        <p:cNvPr id="100" name="Shape 100"/>
+        <p:cNvPr id="103" name="Shape 103"/>
         <p:cNvGrpSpPr/>
         <p:nvPr/>
       </p:nvGrpSpPr>
@@ -1215,7 +1215,7 @@
       </p:grpSpPr>
       <p:sp>
         <p:nvSpPr>
-          <p:cNvPr id="101" name="Google Shape;101;g28953c4cc47_1_52:notes"/>
+          <p:cNvPr id="104" name="Google Shape;104;g28953c4cc47_1_52:notes"/>
           <p:cNvSpPr/>
           <p:nvPr>
             <p:ph idx="2" type="sldImg"/>
@@ -1250,7 +1250,7 @@
       </p:sp>
       <p:sp>
         <p:nvSpPr>
-          <p:cNvPr id="102" name="Google Shape;102;g28953c4cc47_1_52:notes"/>
+          <p:cNvPr id="105" name="Google Shape;105;g28953c4cc47_1_52:notes"/>
           <p:cNvSpPr txBox="1"/>
           <p:nvPr>
             <p:ph idx="1" type="body"/>
@@ -1300,7 +1300,7 @@
   <p:cSld>
     <p:spTree>
       <p:nvGrpSpPr>
-        <p:cNvPr id="108" name="Shape 108"/>
+        <p:cNvPr id="111" name="Shape 111"/>
         <p:cNvGrpSpPr/>
         <p:nvPr/>
       </p:nvGrpSpPr>
@@ -1314,7 +1314,7 @@
       </p:grpSpPr>
       <p:sp>
         <p:nvSpPr>
-          <p:cNvPr id="109" name="Google Shape;109;g28937635197_1_27:notes"/>
+          <p:cNvPr id="112" name="Google Shape;112;g28937635197_1_27:notes"/>
           <p:cNvSpPr/>
           <p:nvPr>
             <p:ph idx="2" type="sldImg"/>
@@ -1349,7 +1349,7 @@
       </p:sp>
       <p:sp>
         <p:nvSpPr>
-          <p:cNvPr id="110" name="Google Shape;110;g28937635197_1_27:notes"/>
+          <p:cNvPr id="113" name="Google Shape;113;g28937635197_1_27:notes"/>
           <p:cNvSpPr txBox="1"/>
           <p:nvPr>
             <p:ph idx="1" type="body"/>
@@ -6264,7 +6264,7 @@
         </p:blipFill>
         <p:spPr>
           <a:xfrm>
-            <a:off x="958433" y="1513025"/>
+            <a:off x="1034633" y="1589225"/>
             <a:ext cx="2383366" cy="1787525"/>
           </a:xfrm>
           <a:prstGeom prst="rect">
@@ -6292,7 +6292,7 @@
         </p:blipFill>
         <p:spPr>
           <a:xfrm>
-            <a:off x="3569050" y="919824"/>
+            <a:off x="3645250" y="996024"/>
             <a:ext cx="2463101" cy="1847326"/>
           </a:xfrm>
           <a:prstGeom prst="rect">
@@ -6320,7 +6320,7 @@
         </p:blipFill>
         <p:spPr>
           <a:xfrm>
-            <a:off x="6335598" y="903425"/>
+            <a:off x="6411798" y="979625"/>
             <a:ext cx="2463099" cy="1847321"/>
           </a:xfrm>
           <a:prstGeom prst="rect">
@@ -6348,7 +6348,7 @@
         </p:blipFill>
         <p:spPr>
           <a:xfrm>
-            <a:off x="3569047" y="2864025"/>
+            <a:off x="3645247" y="2940225"/>
             <a:ext cx="2463101" cy="1847321"/>
           </a:xfrm>
           <a:prstGeom prst="rect">
@@ -6376,7 +6376,7 @@
         </p:blipFill>
         <p:spPr>
           <a:xfrm>
-            <a:off x="6335600" y="2864025"/>
+            <a:off x="6411800" y="2940225"/>
             <a:ext cx="2463101" cy="1847335"/>
           </a:xfrm>
           <a:prstGeom prst="rect">
@@ -6396,7 +6396,7 @@
         </p:nvSpPr>
         <p:spPr>
           <a:xfrm>
-            <a:off x="285225" y="378550"/>
+            <a:off x="132825" y="302350"/>
             <a:ext cx="1740600" cy="1301100"/>
           </a:xfrm>
           <a:prstGeom prst="rect">
@@ -6736,6 +6736,110 @@
           </a:p>
         </p:txBody>
       </p:sp>
+      <p:cxnSp>
+        <p:nvCxnSpPr>
+          <p:cNvPr id="70" name="Google Shape;70;p14"/>
+          <p:cNvCxnSpPr>
+            <a:endCxn id="67" idx="3"/>
+          </p:cNvCxnSpPr>
+          <p:nvPr/>
+        </p:nvCxnSpPr>
+        <p:spPr>
+          <a:xfrm rot="10800000">
+            <a:off x="1873425" y="952900"/>
+            <a:ext cx="549600" cy="357000"/>
+          </a:xfrm>
+          <a:prstGeom prst="straightConnector1">
+            <a:avLst/>
+          </a:prstGeom>
+          <a:noFill/>
+          <a:ln cap="flat" cmpd="sng" w="28575">
+            <a:solidFill>
+              <a:srgbClr val="CC4125"/>
+            </a:solidFill>
+            <a:prstDash val="solid"/>
+            <a:round/>
+            <a:headEnd len="med" w="med" type="none"/>
+            <a:tailEnd len="med" w="med" type="triangle"/>
+          </a:ln>
+        </p:spPr>
+      </p:cxnSp>
+      <p:sp>
+        <p:nvSpPr>
+          <p:cNvPr id="71" name="Google Shape;71;p14"/>
+          <p:cNvSpPr txBox="1"/>
+          <p:nvPr/>
+        </p:nvSpPr>
+        <p:spPr>
+          <a:xfrm>
+            <a:off x="2237295" y="1218522"/>
+            <a:ext cx="1276200" cy="418800"/>
+          </a:xfrm>
+          <a:prstGeom prst="rect">
+            <a:avLst/>
+          </a:prstGeom>
+          <a:noFill/>
+          <a:ln>
+            <a:noFill/>
+          </a:ln>
+        </p:spPr>
+        <p:txBody>
+          <a:bodyPr anchorCtr="0" anchor="t" bIns="91425" lIns="91425" spcFirstLastPara="1" rIns="91425" wrap="square" tIns="91425">
+            <a:noAutofit/>
+          </a:bodyPr>
+          <a:lstStyle/>
+          <a:p>
+            <a:pPr indent="0" lvl="0" marL="0" rtl="0" algn="l">
+              <a:spcBef>
+                <a:spcPts val="0"/>
+              </a:spcBef>
+              <a:spcAft>
+                <a:spcPts val="0"/>
+              </a:spcAft>
+              <a:buNone/>
+            </a:pPr>
+            <a:r>
+              <a:rPr b="1" lang="en" sz="1600">
+                <a:solidFill>
+                  <a:srgbClr val="CC4125"/>
+                </a:solidFill>
+              </a:rPr>
+              <a:t>Too similar</a:t>
+            </a:r>
+            <a:endParaRPr b="1" sz="1600">
+              <a:solidFill>
+                <a:srgbClr val="CC4125"/>
+              </a:solidFill>
+            </a:endParaRPr>
+          </a:p>
+        </p:txBody>
+      </p:sp>
+      <p:cxnSp>
+        <p:nvCxnSpPr>
+          <p:cNvPr id="72" name="Google Shape;72;p14"/>
+          <p:cNvCxnSpPr/>
+          <p:nvPr/>
+        </p:nvCxnSpPr>
+        <p:spPr>
+          <a:xfrm rot="10800000">
+            <a:off x="1873525" y="1224700"/>
+            <a:ext cx="403200" cy="126300"/>
+          </a:xfrm>
+          <a:prstGeom prst="straightConnector1">
+            <a:avLst/>
+          </a:prstGeom>
+          <a:noFill/>
+          <a:ln cap="flat" cmpd="sng" w="28575">
+            <a:solidFill>
+              <a:srgbClr val="CC4125"/>
+            </a:solidFill>
+            <a:prstDash val="solid"/>
+            <a:round/>
+            <a:headEnd len="med" w="med" type="none"/>
+            <a:tailEnd len="med" w="med" type="triangle"/>
+          </a:ln>
+        </p:spPr>
+      </p:cxnSp>
     </p:spTree>
   </p:cSld>
   <p:clrMapOvr>
@@ -6749,7 +6853,7 @@
   <p:cSld>
     <p:spTree>
       <p:nvGrpSpPr>
-        <p:cNvPr id="73" name="Shape 73"/>
+        <p:cNvPr id="76" name="Shape 76"/>
         <p:cNvGrpSpPr/>
         <p:nvPr/>
       </p:nvGrpSpPr>
@@ -6763,7 +6867,7 @@
       </p:grpSpPr>
       <p:pic>
         <p:nvPicPr>
-          <p:cNvPr id="74" name="Google Shape;74;p15"/>
+          <p:cNvPr id="77" name="Google Shape;77;p15"/>
           <p:cNvPicPr preferRelativeResize="0"/>
           <p:nvPr/>
         </p:nvPicPr>
@@ -6791,7 +6895,7 @@
       </p:pic>
       <p:pic>
         <p:nvPicPr>
-          <p:cNvPr id="75" name="Google Shape;75;p15"/>
+          <p:cNvPr id="78" name="Google Shape;78;p15"/>
           <p:cNvPicPr preferRelativeResize="0"/>
           <p:nvPr/>
         </p:nvPicPr>
@@ -6819,7 +6923,7 @@
       </p:pic>
       <p:pic>
         <p:nvPicPr>
-          <p:cNvPr id="76" name="Google Shape;76;p15"/>
+          <p:cNvPr id="79" name="Google Shape;79;p15"/>
           <p:cNvPicPr preferRelativeResize="0"/>
           <p:nvPr/>
         </p:nvPicPr>
@@ -6847,7 +6951,7 @@
       </p:pic>
       <p:pic>
         <p:nvPicPr>
-          <p:cNvPr id="77" name="Google Shape;77;p15"/>
+          <p:cNvPr id="80" name="Google Shape;80;p15"/>
           <p:cNvPicPr preferRelativeResize="0"/>
           <p:nvPr/>
         </p:nvPicPr>
@@ -6875,7 +6979,7 @@
       </p:pic>
       <p:pic>
         <p:nvPicPr>
-          <p:cNvPr id="78" name="Google Shape;78;p15"/>
+          <p:cNvPr id="81" name="Google Shape;81;p15"/>
           <p:cNvPicPr preferRelativeResize="0"/>
           <p:nvPr/>
         </p:nvPicPr>
@@ -6903,7 +7007,7 @@
       </p:pic>
       <p:pic>
         <p:nvPicPr>
-          <p:cNvPr id="79" name="Google Shape;79;p15"/>
+          <p:cNvPr id="82" name="Google Shape;82;p15"/>
           <p:cNvPicPr preferRelativeResize="0"/>
           <p:nvPr/>
         </p:nvPicPr>
@@ -6931,7 +7035,7 @@
       </p:pic>
       <p:sp>
         <p:nvSpPr>
-          <p:cNvPr id="80" name="Google Shape;80;p15"/>
+          <p:cNvPr id="83" name="Google Shape;83;p15"/>
           <p:cNvSpPr txBox="1"/>
           <p:nvPr/>
         </p:nvSpPr>
@@ -7122,13 +7226,13 @@
       </p:sp>
       <p:sp>
         <p:nvSpPr>
-          <p:cNvPr id="81" name="Google Shape;81;p15"/>
+          <p:cNvPr id="84" name="Google Shape;84;p15"/>
           <p:cNvSpPr txBox="1"/>
           <p:nvPr/>
         </p:nvSpPr>
         <p:spPr>
           <a:xfrm>
-            <a:off x="1932800" y="271450"/>
+            <a:off x="1780400" y="271450"/>
             <a:ext cx="7033200" cy="564000"/>
           </a:xfrm>
           <a:prstGeom prst="rect">
@@ -7206,7 +7310,7 @@
   <p:cSld>
     <p:spTree>
       <p:nvGrpSpPr>
-        <p:cNvPr id="85" name="Shape 85"/>
+        <p:cNvPr id="88" name="Shape 88"/>
         <p:cNvGrpSpPr/>
         <p:nvPr/>
       </p:nvGrpSpPr>
@@ -7220,7 +7324,7 @@
       </p:grpSpPr>
       <p:pic>
         <p:nvPicPr>
-          <p:cNvPr id="86" name="Google Shape;86;p16"/>
+          <p:cNvPr id="89" name="Google Shape;89;p16"/>
           <p:cNvPicPr preferRelativeResize="0"/>
           <p:nvPr/>
         </p:nvPicPr>
@@ -7248,7 +7352,7 @@
       </p:pic>
       <p:sp>
         <p:nvSpPr>
-          <p:cNvPr id="87" name="Google Shape;87;p16"/>
+          <p:cNvPr id="90" name="Google Shape;90;p16"/>
           <p:cNvSpPr txBox="1"/>
           <p:nvPr/>
         </p:nvSpPr>
@@ -7309,7 +7413,7 @@
       </p:sp>
       <p:pic>
         <p:nvPicPr>
-          <p:cNvPr id="88" name="Google Shape;88;p16"/>
+          <p:cNvPr id="91" name="Google Shape;91;p16"/>
           <p:cNvPicPr preferRelativeResize="0"/>
           <p:nvPr/>
         </p:nvPicPr>
@@ -7348,7 +7452,7 @@
   <p:cSld>
     <p:spTree>
       <p:nvGrpSpPr>
-        <p:cNvPr id="92" name="Shape 92"/>
+        <p:cNvPr id="95" name="Shape 95"/>
         <p:cNvGrpSpPr/>
         <p:nvPr/>
       </p:nvGrpSpPr>
@@ -7362,7 +7466,7 @@
       </p:grpSpPr>
       <p:pic>
         <p:nvPicPr>
-          <p:cNvPr id="93" name="Google Shape;93;p17"/>
+          <p:cNvPr id="96" name="Google Shape;96;p17"/>
           <p:cNvPicPr preferRelativeResize="0"/>
           <p:nvPr/>
         </p:nvPicPr>
@@ -7390,14 +7494,14 @@
       </p:pic>
       <p:sp>
         <p:nvSpPr>
-          <p:cNvPr id="94" name="Google Shape;94;p17"/>
+          <p:cNvPr id="97" name="Google Shape;97;p17"/>
           <p:cNvSpPr txBox="1"/>
           <p:nvPr/>
         </p:nvSpPr>
         <p:spPr>
           <a:xfrm>
-            <a:off x="556250" y="289075"/>
-            <a:ext cx="8047200" cy="564000"/>
+            <a:off x="708650" y="365275"/>
+            <a:ext cx="7559100" cy="564000"/>
           </a:xfrm>
           <a:prstGeom prst="rect">
             <a:avLst/>
@@ -7447,7 +7551,7 @@
                 <a:cs typeface="Verdana"/>
                 <a:sym typeface="Verdana"/>
               </a:rPr>
-              <a:t> of mean and standard deviation per bucket</a:t>
+              <a:t> of mean and standard deviation per run</a:t>
             </a:r>
             <a:endParaRPr sz="1700">
               <a:solidFill>
@@ -7463,7 +7567,7 @@
       </p:sp>
       <p:pic>
         <p:nvPicPr>
-          <p:cNvPr id="95" name="Google Shape;95;p17"/>
+          <p:cNvPr id="98" name="Google Shape;98;p17"/>
           <p:cNvPicPr preferRelativeResize="0"/>
           <p:nvPr/>
         </p:nvPicPr>
@@ -7491,7 +7595,7 @@
       </p:pic>
       <p:pic>
         <p:nvPicPr>
-          <p:cNvPr id="96" name="Google Shape;96;p17"/>
+          <p:cNvPr id="99" name="Google Shape;99;p17"/>
           <p:cNvPicPr preferRelativeResize="0"/>
           <p:nvPr/>
         </p:nvPicPr>
@@ -7519,7 +7623,7 @@
       </p:pic>
       <p:pic>
         <p:nvPicPr>
-          <p:cNvPr id="97" name="Google Shape;97;p17"/>
+          <p:cNvPr id="100" name="Google Shape;100;p17"/>
           <p:cNvPicPr preferRelativeResize="0"/>
           <p:nvPr/>
         </p:nvPicPr>
@@ -7547,7 +7651,7 @@
       </p:pic>
       <p:pic>
         <p:nvPicPr>
-          <p:cNvPr id="98" name="Google Shape;98;p17"/>
+          <p:cNvPr id="101" name="Google Shape;101;p17"/>
           <p:cNvPicPr preferRelativeResize="0"/>
           <p:nvPr/>
         </p:nvPicPr>
@@ -7575,7 +7679,7 @@
       </p:pic>
       <p:pic>
         <p:nvPicPr>
-          <p:cNvPr id="99" name="Google Shape;99;p17"/>
+          <p:cNvPr id="102" name="Google Shape;102;p17"/>
           <p:cNvPicPr preferRelativeResize="0"/>
           <p:nvPr/>
         </p:nvPicPr>
@@ -7614,7 +7718,7 @@
   <p:cSld>
     <p:spTree>
       <p:nvGrpSpPr>
-        <p:cNvPr id="103" name="Shape 103"/>
+        <p:cNvPr id="106" name="Shape 106"/>
         <p:cNvGrpSpPr/>
         <p:nvPr/>
       </p:nvGrpSpPr>
@@ -7628,7 +7732,7 @@
       </p:grpSpPr>
       <p:pic>
         <p:nvPicPr>
-          <p:cNvPr id="104" name="Google Shape;104;p18"/>
+          <p:cNvPr id="107" name="Google Shape;107;p18"/>
           <p:cNvPicPr preferRelativeResize="0"/>
           <p:nvPr/>
         </p:nvPicPr>
@@ -7656,7 +7760,7 @@
       </p:pic>
       <p:sp>
         <p:nvSpPr>
-          <p:cNvPr id="105" name="Google Shape;105;p18"/>
+          <p:cNvPr id="108" name="Google Shape;108;p18"/>
           <p:cNvSpPr txBox="1"/>
           <p:nvPr/>
         </p:nvSpPr>
@@ -7729,7 +7833,7 @@
       </p:sp>
       <p:pic>
         <p:nvPicPr>
-          <p:cNvPr id="106" name="Google Shape;106;p18"/>
+          <p:cNvPr id="109" name="Google Shape;109;p18"/>
           <p:cNvPicPr preferRelativeResize="0"/>
           <p:nvPr/>
         </p:nvPicPr>
@@ -7757,7 +7861,7 @@
       </p:pic>
       <p:sp>
         <p:nvSpPr>
-          <p:cNvPr id="107" name="Google Shape;107;p18"/>
+          <p:cNvPr id="110" name="Google Shape;110;p18"/>
           <p:cNvSpPr txBox="1"/>
           <p:nvPr/>
         </p:nvSpPr>
@@ -7954,7 +8058,7 @@
   <p:cSld>
     <p:spTree>
       <p:nvGrpSpPr>
-        <p:cNvPr id="111" name="Shape 111"/>
+        <p:cNvPr id="114" name="Shape 114"/>
         <p:cNvGrpSpPr/>
         <p:nvPr/>
       </p:nvGrpSpPr>
@@ -7968,7 +8072,7 @@
       </p:grpSpPr>
       <p:pic>
         <p:nvPicPr>
-          <p:cNvPr id="112" name="Google Shape;112;p19"/>
+          <p:cNvPr id="115" name="Google Shape;115;p19"/>
           <p:cNvPicPr preferRelativeResize="0"/>
           <p:nvPr/>
         </p:nvPicPr>
@@ -7996,7 +8100,7 @@
       </p:pic>
       <p:sp>
         <p:nvSpPr>
-          <p:cNvPr id="113" name="Google Shape;113;p19"/>
+          <p:cNvPr id="116" name="Google Shape;116;p19"/>
           <p:cNvSpPr txBox="1"/>
           <p:nvPr/>
         </p:nvSpPr>
@@ -8078,7 +8182,7 @@
       </p:sp>
       <p:sp>
         <p:nvSpPr>
-          <p:cNvPr id="114" name="Google Shape;114;p19"/>
+          <p:cNvPr id="117" name="Google Shape;117;p19"/>
           <p:cNvSpPr txBox="1"/>
           <p:nvPr/>
         </p:nvSpPr>
@@ -8136,7 +8240,7 @@
       </p:sp>
       <p:sp>
         <p:nvSpPr>
-          <p:cNvPr id="115" name="Google Shape;115;p19"/>
+          <p:cNvPr id="118" name="Google Shape;118;p19"/>
           <p:cNvSpPr txBox="1"/>
           <p:nvPr/>
         </p:nvSpPr>
@@ -8206,7 +8310,7 @@
       </p:sp>
       <p:sp>
         <p:nvSpPr>
-          <p:cNvPr id="116" name="Google Shape;116;p19"/>
+          <p:cNvPr id="119" name="Google Shape;119;p19"/>
           <p:cNvSpPr txBox="1"/>
           <p:nvPr/>
         </p:nvSpPr>

--- a/slides/Tcoki Slidedeck.pptx
+++ b/slides/Tcoki Slidedeck.pptx
@@ -7283,7 +7283,7 @@
                 <a:cs typeface="Verdana"/>
                 <a:sym typeface="Verdana"/>
               </a:rPr>
-              <a:t> O(1)</a:t>
+              <a:t> O(N)</a:t>
             </a:r>
             <a:endParaRPr sz="1700">
               <a:solidFill>
@@ -8375,6 +8375,285 @@
 </file>
 
 <file path=ppt/theme/theme1.xml><?xml version="1.0" encoding="utf-8"?>
+<a:theme xmlns:a="http://schemas.openxmlformats.org/drawingml/2006/main" xmlns:r="http://schemas.openxmlformats.org/officeDocument/2006/relationships">
+  <a:themeElements>
+    <a:clrScheme name="Default">
+      <a:dk1>
+        <a:srgbClr val="000000"/>
+      </a:dk1>
+      <a:lt1>
+        <a:srgbClr val="FFFFFF"/>
+      </a:lt1>
+      <a:dk2>
+        <a:srgbClr val="158158"/>
+      </a:dk2>
+      <a:lt2>
+        <a:srgbClr val="F3F3F3"/>
+      </a:lt2>
+      <a:accent1>
+        <a:srgbClr val="058DC7"/>
+      </a:accent1>
+      <a:accent2>
+        <a:srgbClr val="50B432"/>
+      </a:accent2>
+      <a:accent3>
+        <a:srgbClr val="ED561B"/>
+      </a:accent3>
+      <a:accent4>
+        <a:srgbClr val="EDEF00"/>
+      </a:accent4>
+      <a:accent5>
+        <a:srgbClr val="24CBE5"/>
+      </a:accent5>
+      <a:accent6>
+        <a:srgbClr val="64E572"/>
+      </a:accent6>
+      <a:hlink>
+        <a:srgbClr val="2200CC"/>
+      </a:hlink>
+      <a:folHlink>
+        <a:srgbClr val="551A8B"/>
+      </a:folHlink>
+    </a:clrScheme>
+    <a:fontScheme name="Office">
+      <a:majorFont>
+        <a:latin typeface="Arial"/>
+        <a:ea typeface=""/>
+        <a:cs typeface=""/>
+        <a:font script="Jpan" typeface="ＭＳ Ｐゴシック"/>
+        <a:font script="Hang" typeface="맑은 고딕"/>
+        <a:font script="Hans" typeface="宋体"/>
+        <a:font script="Hant" typeface="新細明體"/>
+        <a:font script="Arab" typeface="Times New Roman"/>
+        <a:font script="Hebr" typeface="Times New Roman"/>
+        <a:font script="Thai" typeface="Angsana New"/>
+        <a:font script="Ethi" typeface="Nyala"/>
+        <a:font script="Beng" typeface="Vrinda"/>
+        <a:font script="Gujr" typeface="Shruti"/>
+        <a:font script="Khmr" typeface="MoolBoran"/>
+        <a:font script="Knda" typeface="Tunga"/>
+        <a:font script="Guru" typeface="Raavi"/>
+        <a:font script="Cans" typeface="Euphemia"/>
+        <a:font script="Cher" typeface="Plantagenet Cherokee"/>
+        <a:font script="Yiii" typeface="Microsoft Yi Baiti"/>
+        <a:font script="Tibt" typeface="Microsoft Himalaya"/>
+        <a:font script="Thaa" typeface="MV Boli"/>
+        <a:font script="Deva" typeface="Mangal"/>
+        <a:font script="Telu" typeface="Gautami"/>
+        <a:font script="Taml" typeface="Latha"/>
+        <a:font script="Syrc" typeface="Estrangelo Edessa"/>
+        <a:font script="Orya" typeface="Kalinga"/>
+        <a:font script="Mlym" typeface="Kartika"/>
+        <a:font script="Laoo" typeface="DokChampa"/>
+        <a:font script="Sinh" typeface="Iskoola Pota"/>
+        <a:font script="Mong" typeface="Mongolian Baiti"/>
+        <a:font script="Viet" typeface="Times New Roman"/>
+        <a:font script="Uigh" typeface="Microsoft Uighur"/>
+        <a:font script="Geor" typeface="Sylfaen"/>
+      </a:majorFont>
+      <a:minorFont>
+        <a:latin typeface="Arial"/>
+        <a:ea typeface=""/>
+        <a:cs typeface=""/>
+        <a:font script="Jpan" typeface="ＭＳ Ｐゴシック"/>
+        <a:font script="Hang" typeface="맑은 고딕"/>
+        <a:font script="Hans" typeface="宋体"/>
+        <a:font script="Hant" typeface="新細明體"/>
+        <a:font script="Arab" typeface="Arial"/>
+        <a:font script="Hebr" typeface="Arial"/>
+        <a:font script="Thai" typeface="Cordia New"/>
+        <a:font script="Ethi" typeface="Nyala"/>
+        <a:font script="Beng" typeface="Vrinda"/>
+        <a:font script="Gujr" typeface="Shruti"/>
+        <a:font script="Khmr" typeface="DaunPenh"/>
+        <a:font script="Knda" typeface="Tunga"/>
+        <a:font script="Guru" typeface="Raavi"/>
+        <a:font script="Cans" typeface="Euphemia"/>
+        <a:font script="Cher" typeface="Plantagenet Cherokee"/>
+        <a:font script="Yiii" typeface="Microsoft Yi Baiti"/>
+        <a:font script="Tibt" typeface="Microsoft Himalaya"/>
+        <a:font script="Thaa" typeface="MV Boli"/>
+        <a:font script="Deva" typeface="Mangal"/>
+        <a:font script="Telu" typeface="Gautami"/>
+        <a:font script="Taml" typeface="Latha"/>
+        <a:font script="Syrc" typeface="Estrangelo Edessa"/>
+        <a:font script="Orya" typeface="Kalinga"/>
+        <a:font script="Mlym" typeface="Kartika"/>
+        <a:font script="Laoo" typeface="DokChampa"/>
+        <a:font script="Sinh" typeface="Iskoola Pota"/>
+        <a:font script="Mong" typeface="Mongolian Baiti"/>
+        <a:font script="Viet" typeface="Arial"/>
+        <a:font script="Uigh" typeface="Microsoft Uighur"/>
+        <a:font script="Geor" typeface="Sylfaen"/>
+      </a:minorFont>
+    </a:fontScheme>
+    <a:fmtScheme name="Office">
+      <a:fillStyleLst>
+        <a:solidFill>
+          <a:schemeClr val="phClr"/>
+        </a:solidFill>
+        <a:gradFill rotWithShape="1">
+          <a:gsLst>
+            <a:gs pos="0">
+              <a:schemeClr val="phClr">
+                <a:tint val="50000"/>
+                <a:satMod val="300000"/>
+              </a:schemeClr>
+            </a:gs>
+            <a:gs pos="35000">
+              <a:schemeClr val="phClr">
+                <a:tint val="37000"/>
+                <a:satMod val="300000"/>
+              </a:schemeClr>
+            </a:gs>
+            <a:gs pos="100000">
+              <a:schemeClr val="phClr">
+                <a:tint val="15000"/>
+                <a:satMod val="350000"/>
+              </a:schemeClr>
+            </a:gs>
+          </a:gsLst>
+          <a:lin ang="16200000" scaled="1"/>
+        </a:gradFill>
+        <a:gradFill rotWithShape="1">
+          <a:gsLst>
+            <a:gs pos="0">
+              <a:schemeClr val="phClr">
+                <a:tint val="100000"/>
+                <a:shade val="100000"/>
+                <a:satMod val="130000"/>
+              </a:schemeClr>
+            </a:gs>
+            <a:gs pos="100000">
+              <a:schemeClr val="phClr">
+                <a:tint val="50000"/>
+                <a:shade val="100000"/>
+                <a:satMod val="350000"/>
+              </a:schemeClr>
+            </a:gs>
+          </a:gsLst>
+          <a:lin ang="16200000" scaled="0"/>
+        </a:gradFill>
+      </a:fillStyleLst>
+      <a:lnStyleLst>
+        <a:ln w="9525" cap="flat" cmpd="sng" algn="ctr">
+          <a:solidFill>
+            <a:schemeClr val="phClr">
+              <a:shade val="95000"/>
+              <a:satMod val="105000"/>
+            </a:schemeClr>
+          </a:solidFill>
+          <a:prstDash val="solid"/>
+        </a:ln>
+        <a:ln w="25400" cap="flat" cmpd="sng" algn="ctr">
+          <a:solidFill>
+            <a:schemeClr val="phClr"/>
+          </a:solidFill>
+          <a:prstDash val="solid"/>
+        </a:ln>
+        <a:ln w="38100" cap="flat" cmpd="sng" algn="ctr">
+          <a:solidFill>
+            <a:schemeClr val="phClr"/>
+          </a:solidFill>
+          <a:prstDash val="solid"/>
+        </a:ln>
+      </a:lnStyleLst>
+      <a:effectStyleLst>
+        <a:effectStyle>
+          <a:effectLst>
+            <a:outerShdw blurRad="40000" dist="20000" dir="5400000" rotWithShape="0">
+              <a:srgbClr val="000000">
+                <a:alpha val="38000"/>
+              </a:srgbClr>
+            </a:outerShdw>
+          </a:effectLst>
+        </a:effectStyle>
+        <a:effectStyle>
+          <a:effectLst>
+            <a:outerShdw blurRad="40000" dist="23000" dir="5400000" rotWithShape="0">
+              <a:srgbClr val="000000">
+                <a:alpha val="35000"/>
+              </a:srgbClr>
+            </a:outerShdw>
+          </a:effectLst>
+        </a:effectStyle>
+        <a:effectStyle>
+          <a:effectLst>
+            <a:outerShdw blurRad="40000" dist="23000" dir="5400000" rotWithShape="0">
+              <a:srgbClr val="000000">
+                <a:alpha val="35000"/>
+              </a:srgbClr>
+            </a:outerShdw>
+          </a:effectLst>
+          <a:scene3d>
+            <a:camera prst="orthographicFront">
+              <a:rot lat="0" lon="0" rev="0"/>
+            </a:camera>
+            <a:lightRig rig="threePt" dir="t">
+              <a:rot lat="0" lon="0" rev="1200000"/>
+            </a:lightRig>
+          </a:scene3d>
+          <a:sp3d>
+            <a:bevelT w="63500" h="25400"/>
+          </a:sp3d>
+        </a:effectStyle>
+      </a:effectStyleLst>
+      <a:bgFillStyleLst>
+        <a:solidFill>
+          <a:schemeClr val="phClr"/>
+        </a:solidFill>
+        <a:gradFill rotWithShape="1">
+          <a:gsLst>
+            <a:gs pos="0">
+              <a:schemeClr val="phClr">
+                <a:tint val="40000"/>
+                <a:satMod val="350000"/>
+              </a:schemeClr>
+            </a:gs>
+            <a:gs pos="40000">
+              <a:schemeClr val="phClr">
+                <a:tint val="45000"/>
+                <a:shade val="99000"/>
+                <a:satMod val="350000"/>
+              </a:schemeClr>
+            </a:gs>
+            <a:gs pos="100000">
+              <a:schemeClr val="phClr">
+                <a:shade val="20000"/>
+                <a:satMod val="255000"/>
+              </a:schemeClr>
+            </a:gs>
+          </a:gsLst>
+          <a:path path="circle">
+            <a:fillToRect l="50000" t="-80000" r="50000" b="180000"/>
+          </a:path>
+        </a:gradFill>
+        <a:gradFill rotWithShape="1">
+          <a:gsLst>
+            <a:gs pos="0">
+              <a:schemeClr val="phClr">
+                <a:tint val="80000"/>
+                <a:satMod val="300000"/>
+              </a:schemeClr>
+            </a:gs>
+            <a:gs pos="100000">
+              <a:schemeClr val="phClr">
+                <a:shade val="30000"/>
+                <a:satMod val="200000"/>
+              </a:schemeClr>
+            </a:gs>
+          </a:gsLst>
+          <a:path path="circle">
+            <a:fillToRect l="50000" t="50000" r="50000" b="50000"/>
+          </a:path>
+        </a:gradFill>
+      </a:bgFillStyleLst>
+    </a:fmtScheme>
+  </a:themeElements>
+</a:theme>
+</file>
+
+<file path=ppt/theme/theme2.xml><?xml version="1.0" encoding="utf-8"?>
 <a:theme xmlns:a="http://schemas.openxmlformats.org/drawingml/2006/main" xmlns:r="http://schemas.openxmlformats.org/officeDocument/2006/relationships" name="Simple Light">
   <a:themeElements>
     <a:clrScheme name="Simple Light">
@@ -8651,283 +8930,4 @@
     </a:fmtScheme>
   </a:themeElements>
 </a:theme>
-</file>
-
-<file path=ppt/theme/theme2.xml><?xml version="1.0" encoding="utf-8"?>
-<a:theme xmlns:a="http://schemas.openxmlformats.org/drawingml/2006/main" xmlns:r="http://schemas.openxmlformats.org/officeDocument/2006/relationships">
-  <a:themeElements>
-    <a:clrScheme name="Default">
-      <a:dk1>
-        <a:srgbClr val="000000"/>
-      </a:dk1>
-      <a:lt1>
-        <a:srgbClr val="FFFFFF"/>
-      </a:lt1>
-      <a:dk2>
-        <a:srgbClr val="158158"/>
-      </a:dk2>
-      <a:lt2>
-        <a:srgbClr val="F3F3F3"/>
-      </a:lt2>
-      <a:accent1>
-        <a:srgbClr val="058DC7"/>
-      </a:accent1>
-      <a:accent2>
-        <a:srgbClr val="50B432"/>
-      </a:accent2>
-      <a:accent3>
-        <a:srgbClr val="ED561B"/>
-      </a:accent3>
-      <a:accent4>
-        <a:srgbClr val="EDEF00"/>
-      </a:accent4>
-      <a:accent5>
-        <a:srgbClr val="24CBE5"/>
-      </a:accent5>
-      <a:accent6>
-        <a:srgbClr val="64E572"/>
-      </a:accent6>
-      <a:hlink>
-        <a:srgbClr val="2200CC"/>
-      </a:hlink>
-      <a:folHlink>
-        <a:srgbClr val="551A8B"/>
-      </a:folHlink>
-    </a:clrScheme>
-    <a:fontScheme name="Office">
-      <a:majorFont>
-        <a:latin typeface="Arial"/>
-        <a:ea typeface=""/>
-        <a:cs typeface=""/>
-        <a:font script="Jpan" typeface="ＭＳ Ｐゴシック"/>
-        <a:font script="Hang" typeface="맑은 고딕"/>
-        <a:font script="Hans" typeface="宋体"/>
-        <a:font script="Hant" typeface="新細明體"/>
-        <a:font script="Arab" typeface="Times New Roman"/>
-        <a:font script="Hebr" typeface="Times New Roman"/>
-        <a:font script="Thai" typeface="Angsana New"/>
-        <a:font script="Ethi" typeface="Nyala"/>
-        <a:font script="Beng" typeface="Vrinda"/>
-        <a:font script="Gujr" typeface="Shruti"/>
-        <a:font script="Khmr" typeface="MoolBoran"/>
-        <a:font script="Knda" typeface="Tunga"/>
-        <a:font script="Guru" typeface="Raavi"/>
-        <a:font script="Cans" typeface="Euphemia"/>
-        <a:font script="Cher" typeface="Plantagenet Cherokee"/>
-        <a:font script="Yiii" typeface="Microsoft Yi Baiti"/>
-        <a:font script="Tibt" typeface="Microsoft Himalaya"/>
-        <a:font script="Thaa" typeface="MV Boli"/>
-        <a:font script="Deva" typeface="Mangal"/>
-        <a:font script="Telu" typeface="Gautami"/>
-        <a:font script="Taml" typeface="Latha"/>
-        <a:font script="Syrc" typeface="Estrangelo Edessa"/>
-        <a:font script="Orya" typeface="Kalinga"/>
-        <a:font script="Mlym" typeface="Kartika"/>
-        <a:font script="Laoo" typeface="DokChampa"/>
-        <a:font script="Sinh" typeface="Iskoola Pota"/>
-        <a:font script="Mong" typeface="Mongolian Baiti"/>
-        <a:font script="Viet" typeface="Times New Roman"/>
-        <a:font script="Uigh" typeface="Microsoft Uighur"/>
-        <a:font script="Geor" typeface="Sylfaen"/>
-      </a:majorFont>
-      <a:minorFont>
-        <a:latin typeface="Arial"/>
-        <a:ea typeface=""/>
-        <a:cs typeface=""/>
-        <a:font script="Jpan" typeface="ＭＳ Ｐゴシック"/>
-        <a:font script="Hang" typeface="맑은 고딕"/>
-        <a:font script="Hans" typeface="宋体"/>
-        <a:font script="Hant" typeface="新細明體"/>
-        <a:font script="Arab" typeface="Arial"/>
-        <a:font script="Hebr" typeface="Arial"/>
-        <a:font script="Thai" typeface="Cordia New"/>
-        <a:font script="Ethi" typeface="Nyala"/>
-        <a:font script="Beng" typeface="Vrinda"/>
-        <a:font script="Gujr" typeface="Shruti"/>
-        <a:font script="Khmr" typeface="DaunPenh"/>
-        <a:font script="Knda" typeface="Tunga"/>
-        <a:font script="Guru" typeface="Raavi"/>
-        <a:font script="Cans" typeface="Euphemia"/>
-        <a:font script="Cher" typeface="Plantagenet Cherokee"/>
-        <a:font script="Yiii" typeface="Microsoft Yi Baiti"/>
-        <a:font script="Tibt" typeface="Microsoft Himalaya"/>
-        <a:font script="Thaa" typeface="MV Boli"/>
-        <a:font script="Deva" typeface="Mangal"/>
-        <a:font script="Telu" typeface="Gautami"/>
-        <a:font script="Taml" typeface="Latha"/>
-        <a:font script="Syrc" typeface="Estrangelo Edessa"/>
-        <a:font script="Orya" typeface="Kalinga"/>
-        <a:font script="Mlym" typeface="Kartika"/>
-        <a:font script="Laoo" typeface="DokChampa"/>
-        <a:font script="Sinh" typeface="Iskoola Pota"/>
-        <a:font script="Mong" typeface="Mongolian Baiti"/>
-        <a:font script="Viet" typeface="Arial"/>
-        <a:font script="Uigh" typeface="Microsoft Uighur"/>
-        <a:font script="Geor" typeface="Sylfaen"/>
-      </a:minorFont>
-    </a:fontScheme>
-    <a:fmtScheme name="Office">
-      <a:fillStyleLst>
-        <a:solidFill>
-          <a:schemeClr val="phClr"/>
-        </a:solidFill>
-        <a:gradFill rotWithShape="1">
-          <a:gsLst>
-            <a:gs pos="0">
-              <a:schemeClr val="phClr">
-                <a:tint val="50000"/>
-                <a:satMod val="300000"/>
-              </a:schemeClr>
-            </a:gs>
-            <a:gs pos="35000">
-              <a:schemeClr val="phClr">
-                <a:tint val="37000"/>
-                <a:satMod val="300000"/>
-              </a:schemeClr>
-            </a:gs>
-            <a:gs pos="100000">
-              <a:schemeClr val="phClr">
-                <a:tint val="15000"/>
-                <a:satMod val="350000"/>
-              </a:schemeClr>
-            </a:gs>
-          </a:gsLst>
-          <a:lin ang="16200000" scaled="1"/>
-        </a:gradFill>
-        <a:gradFill rotWithShape="1">
-          <a:gsLst>
-            <a:gs pos="0">
-              <a:schemeClr val="phClr">
-                <a:tint val="100000"/>
-                <a:shade val="100000"/>
-                <a:satMod val="130000"/>
-              </a:schemeClr>
-            </a:gs>
-            <a:gs pos="100000">
-              <a:schemeClr val="phClr">
-                <a:tint val="50000"/>
-                <a:shade val="100000"/>
-                <a:satMod val="350000"/>
-              </a:schemeClr>
-            </a:gs>
-          </a:gsLst>
-          <a:lin ang="16200000" scaled="0"/>
-        </a:gradFill>
-      </a:fillStyleLst>
-      <a:lnStyleLst>
-        <a:ln w="9525" cap="flat" cmpd="sng" algn="ctr">
-          <a:solidFill>
-            <a:schemeClr val="phClr">
-              <a:shade val="95000"/>
-              <a:satMod val="105000"/>
-            </a:schemeClr>
-          </a:solidFill>
-          <a:prstDash val="solid"/>
-        </a:ln>
-        <a:ln w="25400" cap="flat" cmpd="sng" algn="ctr">
-          <a:solidFill>
-            <a:schemeClr val="phClr"/>
-          </a:solidFill>
-          <a:prstDash val="solid"/>
-        </a:ln>
-        <a:ln w="38100" cap="flat" cmpd="sng" algn="ctr">
-          <a:solidFill>
-            <a:schemeClr val="phClr"/>
-          </a:solidFill>
-          <a:prstDash val="solid"/>
-        </a:ln>
-      </a:lnStyleLst>
-      <a:effectStyleLst>
-        <a:effectStyle>
-          <a:effectLst>
-            <a:outerShdw blurRad="40000" dist="20000" dir="5400000" rotWithShape="0">
-              <a:srgbClr val="000000">
-                <a:alpha val="38000"/>
-              </a:srgbClr>
-            </a:outerShdw>
-          </a:effectLst>
-        </a:effectStyle>
-        <a:effectStyle>
-          <a:effectLst>
-            <a:outerShdw blurRad="40000" dist="23000" dir="5400000" rotWithShape="0">
-              <a:srgbClr val="000000">
-                <a:alpha val="35000"/>
-              </a:srgbClr>
-            </a:outerShdw>
-          </a:effectLst>
-        </a:effectStyle>
-        <a:effectStyle>
-          <a:effectLst>
-            <a:outerShdw blurRad="40000" dist="23000" dir="5400000" rotWithShape="0">
-              <a:srgbClr val="000000">
-                <a:alpha val="35000"/>
-              </a:srgbClr>
-            </a:outerShdw>
-          </a:effectLst>
-          <a:scene3d>
-            <a:camera prst="orthographicFront">
-              <a:rot lat="0" lon="0" rev="0"/>
-            </a:camera>
-            <a:lightRig rig="threePt" dir="t">
-              <a:rot lat="0" lon="0" rev="1200000"/>
-            </a:lightRig>
-          </a:scene3d>
-          <a:sp3d>
-            <a:bevelT w="63500" h="25400"/>
-          </a:sp3d>
-        </a:effectStyle>
-      </a:effectStyleLst>
-      <a:bgFillStyleLst>
-        <a:solidFill>
-          <a:schemeClr val="phClr"/>
-        </a:solidFill>
-        <a:gradFill rotWithShape="1">
-          <a:gsLst>
-            <a:gs pos="0">
-              <a:schemeClr val="phClr">
-                <a:tint val="40000"/>
-                <a:satMod val="350000"/>
-              </a:schemeClr>
-            </a:gs>
-            <a:gs pos="40000">
-              <a:schemeClr val="phClr">
-                <a:tint val="45000"/>
-                <a:shade val="99000"/>
-                <a:satMod val="350000"/>
-              </a:schemeClr>
-            </a:gs>
-            <a:gs pos="100000">
-              <a:schemeClr val="phClr">
-                <a:shade val="20000"/>
-                <a:satMod val="255000"/>
-              </a:schemeClr>
-            </a:gs>
-          </a:gsLst>
-          <a:path path="circle">
-            <a:fillToRect l="50000" t="-80000" r="50000" b="180000"/>
-          </a:path>
-        </a:gradFill>
-        <a:gradFill rotWithShape="1">
-          <a:gsLst>
-            <a:gs pos="0">
-              <a:schemeClr val="phClr">
-                <a:tint val="80000"/>
-                <a:satMod val="300000"/>
-              </a:schemeClr>
-            </a:gs>
-            <a:gs pos="100000">
-              <a:schemeClr val="phClr">
-                <a:shade val="30000"/>
-                <a:satMod val="200000"/>
-              </a:schemeClr>
-            </a:gs>
-          </a:gsLst>
-          <a:path path="circle">
-            <a:fillToRect l="50000" t="50000" r="50000" b="50000"/>
-          </a:path>
-        </a:gradFill>
-      </a:bgFillStyleLst>
-    </a:fmtScheme>
-  </a:themeElements>
-</a:theme>
 </file>
--- a/slides/Tcoki Slidedeck.pptx
+++ b/slides/Tcoki Slidedeck.pptx
@@ -805,7 +805,7 @@
   <p:cSld>
     <p:spTree>
       <p:nvGrpSpPr>
-        <p:cNvPr id="57" name="Shape 57"/>
+        <p:cNvPr id="58" name="Shape 58"/>
         <p:cNvGrpSpPr/>
         <p:nvPr/>
       </p:nvGrpSpPr>
@@ -819,7 +819,7 @@
       </p:grpSpPr>
       <p:sp>
         <p:nvSpPr>
-          <p:cNvPr id="58" name="Google Shape;58;g28937635197_1_15:notes"/>
+          <p:cNvPr id="59" name="Google Shape;59;g28937635197_1_15:notes"/>
           <p:cNvSpPr/>
           <p:nvPr>
             <p:ph idx="2" type="sldImg"/>
@@ -854,7 +854,7 @@
       </p:sp>
       <p:sp>
         <p:nvSpPr>
-          <p:cNvPr id="59" name="Google Shape;59;g28937635197_1_15:notes"/>
+          <p:cNvPr id="60" name="Google Shape;60;g28937635197_1_15:notes"/>
           <p:cNvSpPr txBox="1"/>
           <p:nvPr>
             <p:ph idx="1" type="body"/>
@@ -904,7 +904,7 @@
   <p:cSld>
     <p:spTree>
       <p:nvGrpSpPr>
-        <p:cNvPr id="73" name="Shape 73"/>
+        <p:cNvPr id="74" name="Shape 74"/>
         <p:cNvGrpSpPr/>
         <p:nvPr/>
       </p:nvGrpSpPr>
@@ -918,7 +918,7 @@
       </p:grpSpPr>
       <p:sp>
         <p:nvSpPr>
-          <p:cNvPr id="74" name="Google Shape;74;g28953c4cc47_1_2:notes"/>
+          <p:cNvPr id="75" name="Google Shape;75;g28953c4cc47_1_2:notes"/>
           <p:cNvSpPr/>
           <p:nvPr>
             <p:ph idx="2" type="sldImg"/>
@@ -953,7 +953,7 @@
       </p:sp>
       <p:sp>
         <p:nvSpPr>
-          <p:cNvPr id="75" name="Google Shape;75;g28953c4cc47_1_2:notes"/>
+          <p:cNvPr id="76" name="Google Shape;76;g28953c4cc47_1_2:notes"/>
           <p:cNvSpPr txBox="1"/>
           <p:nvPr>
             <p:ph idx="1" type="body"/>
@@ -1003,7 +1003,7 @@
   <p:cSld>
     <p:spTree>
       <p:nvGrpSpPr>
-        <p:cNvPr id="85" name="Shape 85"/>
+        <p:cNvPr id="86" name="Shape 86"/>
         <p:cNvGrpSpPr/>
         <p:nvPr/>
       </p:nvGrpSpPr>
@@ -1017,7 +1017,7 @@
       </p:grpSpPr>
       <p:sp>
         <p:nvSpPr>
-          <p:cNvPr id="86" name="Google Shape;86;g28937635197_1_23:notes"/>
+          <p:cNvPr id="87" name="Google Shape;87;g28937635197_1_23:notes"/>
           <p:cNvSpPr/>
           <p:nvPr>
             <p:ph idx="2" type="sldImg"/>
@@ -1052,7 +1052,7 @@
       </p:sp>
       <p:sp>
         <p:nvSpPr>
-          <p:cNvPr id="87" name="Google Shape;87;g28937635197_1_23:notes"/>
+          <p:cNvPr id="88" name="Google Shape;88;g28937635197_1_23:notes"/>
           <p:cNvSpPr txBox="1"/>
           <p:nvPr>
             <p:ph idx="1" type="body"/>
@@ -1102,7 +1102,7 @@
   <p:cSld>
     <p:spTree>
       <p:nvGrpSpPr>
-        <p:cNvPr id="92" name="Shape 92"/>
+        <p:cNvPr id="93" name="Shape 93"/>
         <p:cNvGrpSpPr/>
         <p:nvPr/>
       </p:nvGrpSpPr>
@@ -1116,7 +1116,7 @@
       </p:grpSpPr>
       <p:sp>
         <p:nvSpPr>
-          <p:cNvPr id="93" name="Google Shape;93;g28953c4cc47_1_23:notes"/>
+          <p:cNvPr id="94" name="Google Shape;94;g28953c4cc47_1_23:notes"/>
           <p:cNvSpPr/>
           <p:nvPr>
             <p:ph idx="2" type="sldImg"/>
@@ -1151,7 +1151,7 @@
       </p:sp>
       <p:sp>
         <p:nvSpPr>
-          <p:cNvPr id="94" name="Google Shape;94;g28953c4cc47_1_23:notes"/>
+          <p:cNvPr id="95" name="Google Shape;95;g28953c4cc47_1_23:notes"/>
           <p:cNvSpPr txBox="1"/>
           <p:nvPr>
             <p:ph idx="1" type="body"/>
@@ -1201,7 +1201,7 @@
   <p:cSld>
     <p:spTree>
       <p:nvGrpSpPr>
-        <p:cNvPr id="103" name="Shape 103"/>
+        <p:cNvPr id="104" name="Shape 104"/>
         <p:cNvGrpSpPr/>
         <p:nvPr/>
       </p:nvGrpSpPr>
@@ -1215,7 +1215,7 @@
       </p:grpSpPr>
       <p:sp>
         <p:nvSpPr>
-          <p:cNvPr id="104" name="Google Shape;104;g28953c4cc47_1_52:notes"/>
+          <p:cNvPr id="105" name="Google Shape;105;g28953c4cc47_1_52:notes"/>
           <p:cNvSpPr/>
           <p:nvPr>
             <p:ph idx="2" type="sldImg"/>
@@ -1250,7 +1250,7 @@
       </p:sp>
       <p:sp>
         <p:nvSpPr>
-          <p:cNvPr id="105" name="Google Shape;105;g28953c4cc47_1_52:notes"/>
+          <p:cNvPr id="106" name="Google Shape;106;g28953c4cc47_1_52:notes"/>
           <p:cNvSpPr txBox="1"/>
           <p:nvPr>
             <p:ph idx="1" type="body"/>
@@ -1300,7 +1300,7 @@
   <p:cSld>
     <p:spTree>
       <p:nvGrpSpPr>
-        <p:cNvPr id="111" name="Shape 111"/>
+        <p:cNvPr id="112" name="Shape 112"/>
         <p:cNvGrpSpPr/>
         <p:nvPr/>
       </p:nvGrpSpPr>
@@ -1314,7 +1314,7 @@
       </p:grpSpPr>
       <p:sp>
         <p:nvSpPr>
-          <p:cNvPr id="112" name="Google Shape;112;g28937635197_1_27:notes"/>
+          <p:cNvPr id="113" name="Google Shape;113;g28937635197_1_27:notes"/>
           <p:cNvSpPr/>
           <p:nvPr>
             <p:ph idx="2" type="sldImg"/>
@@ -1349,7 +1349,7 @@
       </p:sp>
       <p:sp>
         <p:nvSpPr>
-          <p:cNvPr id="113" name="Google Shape;113;g28937635197_1_27:notes"/>
+          <p:cNvPr id="114" name="Google Shape;114;g28937635197_1_27:notes"/>
           <p:cNvSpPr txBox="1"/>
           <p:nvPr>
             <p:ph idx="1" type="body"/>
@@ -6195,6 +6195,58 @@
           </a:ln>
         </p:spPr>
       </p:pic>
+      <p:sp>
+        <p:nvSpPr>
+          <p:cNvPr id="57" name="Google Shape;57;p13">
+            <a:hlinkClick r:id="rId4"/>
+          </p:cNvPr>
+          <p:cNvSpPr txBox="1"/>
+          <p:nvPr/>
+        </p:nvSpPr>
+        <p:spPr>
+          <a:xfrm>
+            <a:off x="2931475" y="3671325"/>
+            <a:ext cx="3859800" cy="555900"/>
+          </a:xfrm>
+          <a:prstGeom prst="rect">
+            <a:avLst/>
+          </a:prstGeom>
+          <a:noFill/>
+          <a:ln>
+            <a:noFill/>
+          </a:ln>
+        </p:spPr>
+        <p:txBody>
+          <a:bodyPr anchorCtr="0" anchor="t" bIns="91425" lIns="91425" spcFirstLastPara="1" rIns="91425" wrap="square" tIns="91425">
+            <a:noAutofit/>
+          </a:bodyPr>
+          <a:lstStyle/>
+          <a:p>
+            <a:pPr indent="0" lvl="0" marL="0" rtl="0" algn="l">
+              <a:spcBef>
+                <a:spcPts val="0"/>
+              </a:spcBef>
+              <a:spcAft>
+                <a:spcPts val="0"/>
+              </a:spcAft>
+              <a:buNone/>
+            </a:pPr>
+            <a:r>
+              <a:rPr lang="en" sz="2400" u="sng">
+                <a:solidFill>
+                  <a:srgbClr val="9900FF"/>
+                </a:solidFill>
+              </a:rPr>
+              <a:t>https://code.tupleshop.com</a:t>
+            </a:r>
+            <a:endParaRPr sz="2400" u="sng">
+              <a:solidFill>
+                <a:srgbClr val="9900FF"/>
+              </a:solidFill>
+            </a:endParaRPr>
+          </a:p>
+        </p:txBody>
+      </p:sp>
     </p:spTree>
   </p:cSld>
   <p:clrMapOvr>
@@ -6208,7 +6260,7 @@
   <p:cSld>
     <p:spTree>
       <p:nvGrpSpPr>
-        <p:cNvPr id="60" name="Shape 60"/>
+        <p:cNvPr id="61" name="Shape 61"/>
         <p:cNvGrpSpPr/>
         <p:nvPr/>
       </p:nvGrpSpPr>
@@ -6222,7 +6274,7 @@
       </p:grpSpPr>
       <p:pic>
         <p:nvPicPr>
-          <p:cNvPr id="61" name="Google Shape;61;p14"/>
+          <p:cNvPr id="62" name="Google Shape;62;p14"/>
           <p:cNvPicPr preferRelativeResize="0"/>
           <p:nvPr/>
         </p:nvPicPr>
@@ -6250,7 +6302,7 @@
       </p:pic>
       <p:pic>
         <p:nvPicPr>
-          <p:cNvPr id="62" name="Google Shape;62;p14"/>
+          <p:cNvPr id="63" name="Google Shape;63;p14"/>
           <p:cNvPicPr preferRelativeResize="0"/>
           <p:nvPr/>
         </p:nvPicPr>
@@ -6278,7 +6330,7 @@
       </p:pic>
       <p:pic>
         <p:nvPicPr>
-          <p:cNvPr id="63" name="Google Shape;63;p14"/>
+          <p:cNvPr id="64" name="Google Shape;64;p14"/>
           <p:cNvPicPr preferRelativeResize="0"/>
           <p:nvPr/>
         </p:nvPicPr>
@@ -6306,7 +6358,7 @@
       </p:pic>
       <p:pic>
         <p:nvPicPr>
-          <p:cNvPr id="64" name="Google Shape;64;p14"/>
+          <p:cNvPr id="65" name="Google Shape;65;p14"/>
           <p:cNvPicPr preferRelativeResize="0"/>
           <p:nvPr/>
         </p:nvPicPr>
@@ -6334,7 +6386,7 @@
       </p:pic>
       <p:pic>
         <p:nvPicPr>
-          <p:cNvPr id="65" name="Google Shape;65;p14"/>
+          <p:cNvPr id="66" name="Google Shape;66;p14"/>
           <p:cNvPicPr preferRelativeResize="0"/>
           <p:nvPr/>
         </p:nvPicPr>
@@ -6362,7 +6414,7 @@
       </p:pic>
       <p:pic>
         <p:nvPicPr>
-          <p:cNvPr id="66" name="Google Shape;66;p14"/>
+          <p:cNvPr id="67" name="Google Shape;67;p14"/>
           <p:cNvPicPr preferRelativeResize="0"/>
           <p:nvPr/>
         </p:nvPicPr>
@@ -6390,7 +6442,7 @@
       </p:pic>
       <p:sp>
         <p:nvSpPr>
-          <p:cNvPr id="67" name="Google Shape;67;p14"/>
+          <p:cNvPr id="68" name="Google Shape;68;p14"/>
           <p:cNvSpPr txBox="1"/>
           <p:nvPr/>
         </p:nvSpPr>
@@ -6632,7 +6684,7 @@
       </p:sp>
       <p:sp>
         <p:nvSpPr>
-          <p:cNvPr id="68" name="Google Shape;68;p14"/>
+          <p:cNvPr id="69" name="Google Shape;69;p14"/>
           <p:cNvSpPr txBox="1"/>
           <p:nvPr/>
         </p:nvSpPr>
@@ -6677,7 +6729,7 @@
       </p:sp>
       <p:sp>
         <p:nvSpPr>
-          <p:cNvPr id="69" name="Google Shape;69;p14"/>
+          <p:cNvPr id="70" name="Google Shape;70;p14"/>
           <p:cNvSpPr txBox="1"/>
           <p:nvPr/>
         </p:nvSpPr>
@@ -6738,9 +6790,9 @@
       </p:sp>
       <p:cxnSp>
         <p:nvCxnSpPr>
-          <p:cNvPr id="70" name="Google Shape;70;p14"/>
+          <p:cNvPr id="71" name="Google Shape;71;p14"/>
           <p:cNvCxnSpPr>
-            <a:endCxn id="67" idx="3"/>
+            <a:endCxn id="68" idx="3"/>
           </p:cNvCxnSpPr>
           <p:nvPr/>
         </p:nvCxnSpPr>
@@ -6766,7 +6818,7 @@
       </p:cxnSp>
       <p:sp>
         <p:nvSpPr>
-          <p:cNvPr id="71" name="Google Shape;71;p14"/>
+          <p:cNvPr id="72" name="Google Shape;72;p14"/>
           <p:cNvSpPr txBox="1"/>
           <p:nvPr/>
         </p:nvSpPr>
@@ -6816,7 +6868,7 @@
       </p:sp>
       <p:cxnSp>
         <p:nvCxnSpPr>
-          <p:cNvPr id="72" name="Google Shape;72;p14"/>
+          <p:cNvPr id="73" name="Google Shape;73;p14"/>
           <p:cNvCxnSpPr/>
           <p:nvPr/>
         </p:nvCxnSpPr>
@@ -6853,7 +6905,7 @@
   <p:cSld>
     <p:spTree>
       <p:nvGrpSpPr>
-        <p:cNvPr id="76" name="Shape 76"/>
+        <p:cNvPr id="77" name="Shape 77"/>
         <p:cNvGrpSpPr/>
         <p:nvPr/>
       </p:nvGrpSpPr>
@@ -6867,7 +6919,7 @@
       </p:grpSpPr>
       <p:pic>
         <p:nvPicPr>
-          <p:cNvPr id="77" name="Google Shape;77;p15"/>
+          <p:cNvPr id="78" name="Google Shape;78;p15"/>
           <p:cNvPicPr preferRelativeResize="0"/>
           <p:nvPr/>
         </p:nvPicPr>
@@ -6895,7 +6947,7 @@
       </p:pic>
       <p:pic>
         <p:nvPicPr>
-          <p:cNvPr id="78" name="Google Shape;78;p15"/>
+          <p:cNvPr id="79" name="Google Shape;79;p15"/>
           <p:cNvPicPr preferRelativeResize="0"/>
           <p:nvPr/>
         </p:nvPicPr>
@@ -6923,7 +6975,7 @@
       </p:pic>
       <p:pic>
         <p:nvPicPr>
-          <p:cNvPr id="79" name="Google Shape;79;p15"/>
+          <p:cNvPr id="80" name="Google Shape;80;p15"/>
           <p:cNvPicPr preferRelativeResize="0"/>
           <p:nvPr/>
         </p:nvPicPr>
@@ -6951,7 +7003,7 @@
       </p:pic>
       <p:pic>
         <p:nvPicPr>
-          <p:cNvPr id="80" name="Google Shape;80;p15"/>
+          <p:cNvPr id="81" name="Google Shape;81;p15"/>
           <p:cNvPicPr preferRelativeResize="0"/>
           <p:nvPr/>
         </p:nvPicPr>
@@ -6979,7 +7031,7 @@
       </p:pic>
       <p:pic>
         <p:nvPicPr>
-          <p:cNvPr id="81" name="Google Shape;81;p15"/>
+          <p:cNvPr id="82" name="Google Shape;82;p15"/>
           <p:cNvPicPr preferRelativeResize="0"/>
           <p:nvPr/>
         </p:nvPicPr>
@@ -7007,7 +7059,7 @@
       </p:pic>
       <p:pic>
         <p:nvPicPr>
-          <p:cNvPr id="82" name="Google Shape;82;p15"/>
+          <p:cNvPr id="83" name="Google Shape;83;p15"/>
           <p:cNvPicPr preferRelativeResize="0"/>
           <p:nvPr/>
         </p:nvPicPr>
@@ -7035,7 +7087,7 @@
       </p:pic>
       <p:sp>
         <p:nvSpPr>
-          <p:cNvPr id="83" name="Google Shape;83;p15"/>
+          <p:cNvPr id="84" name="Google Shape;84;p15"/>
           <p:cNvSpPr txBox="1"/>
           <p:nvPr/>
         </p:nvSpPr>
@@ -7226,7 +7278,7 @@
       </p:sp>
       <p:sp>
         <p:nvSpPr>
-          <p:cNvPr id="84" name="Google Shape;84;p15"/>
+          <p:cNvPr id="85" name="Google Shape;85;p15"/>
           <p:cNvSpPr txBox="1"/>
           <p:nvPr/>
         </p:nvSpPr>
@@ -7310,7 +7362,7 @@
   <p:cSld>
     <p:spTree>
       <p:nvGrpSpPr>
-        <p:cNvPr id="88" name="Shape 88"/>
+        <p:cNvPr id="89" name="Shape 89"/>
         <p:cNvGrpSpPr/>
         <p:nvPr/>
       </p:nvGrpSpPr>
@@ -7324,7 +7376,7 @@
       </p:grpSpPr>
       <p:pic>
         <p:nvPicPr>
-          <p:cNvPr id="89" name="Google Shape;89;p16"/>
+          <p:cNvPr id="90" name="Google Shape;90;p16"/>
           <p:cNvPicPr preferRelativeResize="0"/>
           <p:nvPr/>
         </p:nvPicPr>
@@ -7352,7 +7404,7 @@
       </p:pic>
       <p:sp>
         <p:nvSpPr>
-          <p:cNvPr id="90" name="Google Shape;90;p16"/>
+          <p:cNvPr id="91" name="Google Shape;91;p16"/>
           <p:cNvSpPr txBox="1"/>
           <p:nvPr/>
         </p:nvSpPr>
@@ -7413,7 +7465,7 @@
       </p:sp>
       <p:pic>
         <p:nvPicPr>
-          <p:cNvPr id="91" name="Google Shape;91;p16"/>
+          <p:cNvPr id="92" name="Google Shape;92;p16"/>
           <p:cNvPicPr preferRelativeResize="0"/>
           <p:nvPr/>
         </p:nvPicPr>
@@ -7452,7 +7504,7 @@
   <p:cSld>
     <p:spTree>
       <p:nvGrpSpPr>
-        <p:cNvPr id="95" name="Shape 95"/>
+        <p:cNvPr id="96" name="Shape 96"/>
         <p:cNvGrpSpPr/>
         <p:nvPr/>
       </p:nvGrpSpPr>
@@ -7466,7 +7518,7 @@
       </p:grpSpPr>
       <p:pic>
         <p:nvPicPr>
-          <p:cNvPr id="96" name="Google Shape;96;p17"/>
+          <p:cNvPr id="97" name="Google Shape;97;p17"/>
           <p:cNvPicPr preferRelativeResize="0"/>
           <p:nvPr/>
         </p:nvPicPr>
@@ -7494,7 +7546,7 @@
       </p:pic>
       <p:sp>
         <p:nvSpPr>
-          <p:cNvPr id="97" name="Google Shape;97;p17"/>
+          <p:cNvPr id="98" name="Google Shape;98;p17"/>
           <p:cNvSpPr txBox="1"/>
           <p:nvPr/>
         </p:nvSpPr>
@@ -7567,7 +7619,7 @@
       </p:sp>
       <p:pic>
         <p:nvPicPr>
-          <p:cNvPr id="98" name="Google Shape;98;p17"/>
+          <p:cNvPr id="99" name="Google Shape;99;p17"/>
           <p:cNvPicPr preferRelativeResize="0"/>
           <p:nvPr/>
         </p:nvPicPr>
@@ -7595,7 +7647,7 @@
       </p:pic>
       <p:pic>
         <p:nvPicPr>
-          <p:cNvPr id="99" name="Google Shape;99;p17"/>
+          <p:cNvPr id="100" name="Google Shape;100;p17"/>
           <p:cNvPicPr preferRelativeResize="0"/>
           <p:nvPr/>
         </p:nvPicPr>
@@ -7623,7 +7675,7 @@
       </p:pic>
       <p:pic>
         <p:nvPicPr>
-          <p:cNvPr id="100" name="Google Shape;100;p17"/>
+          <p:cNvPr id="101" name="Google Shape;101;p17"/>
           <p:cNvPicPr preferRelativeResize="0"/>
           <p:nvPr/>
         </p:nvPicPr>
@@ -7651,7 +7703,7 @@
       </p:pic>
       <p:pic>
         <p:nvPicPr>
-          <p:cNvPr id="101" name="Google Shape;101;p17"/>
+          <p:cNvPr id="102" name="Google Shape;102;p17"/>
           <p:cNvPicPr preferRelativeResize="0"/>
           <p:nvPr/>
         </p:nvPicPr>
@@ -7679,7 +7731,7 @@
       </p:pic>
       <p:pic>
         <p:nvPicPr>
-          <p:cNvPr id="102" name="Google Shape;102;p17"/>
+          <p:cNvPr id="103" name="Google Shape;103;p17"/>
           <p:cNvPicPr preferRelativeResize="0"/>
           <p:nvPr/>
         </p:nvPicPr>
@@ -7718,7 +7770,7 @@
   <p:cSld>
     <p:spTree>
       <p:nvGrpSpPr>
-        <p:cNvPr id="106" name="Shape 106"/>
+        <p:cNvPr id="107" name="Shape 107"/>
         <p:cNvGrpSpPr/>
         <p:nvPr/>
       </p:nvGrpSpPr>
@@ -7732,7 +7784,7 @@
       </p:grpSpPr>
       <p:pic>
         <p:nvPicPr>
-          <p:cNvPr id="107" name="Google Shape;107;p18"/>
+          <p:cNvPr id="108" name="Google Shape;108;p18"/>
           <p:cNvPicPr preferRelativeResize="0"/>
           <p:nvPr/>
         </p:nvPicPr>
@@ -7760,7 +7812,7 @@
       </p:pic>
       <p:sp>
         <p:nvSpPr>
-          <p:cNvPr id="108" name="Google Shape;108;p18"/>
+          <p:cNvPr id="109" name="Google Shape;109;p18"/>
           <p:cNvSpPr txBox="1"/>
           <p:nvPr/>
         </p:nvSpPr>
@@ -7833,7 +7885,7 @@
       </p:sp>
       <p:pic>
         <p:nvPicPr>
-          <p:cNvPr id="109" name="Google Shape;109;p18"/>
+          <p:cNvPr id="110" name="Google Shape;110;p18"/>
           <p:cNvPicPr preferRelativeResize="0"/>
           <p:nvPr/>
         </p:nvPicPr>
@@ -7861,7 +7913,7 @@
       </p:pic>
       <p:sp>
         <p:nvSpPr>
-          <p:cNvPr id="110" name="Google Shape;110;p18"/>
+          <p:cNvPr id="111" name="Google Shape;111;p18"/>
           <p:cNvSpPr txBox="1"/>
           <p:nvPr/>
         </p:nvSpPr>
@@ -8058,7 +8110,7 @@
   <p:cSld>
     <p:spTree>
       <p:nvGrpSpPr>
-        <p:cNvPr id="114" name="Shape 114"/>
+        <p:cNvPr id="115" name="Shape 115"/>
         <p:cNvGrpSpPr/>
         <p:nvPr/>
       </p:nvGrpSpPr>
@@ -8072,7 +8124,7 @@
       </p:grpSpPr>
       <p:pic>
         <p:nvPicPr>
-          <p:cNvPr id="115" name="Google Shape;115;p19"/>
+          <p:cNvPr id="116" name="Google Shape;116;p19"/>
           <p:cNvPicPr preferRelativeResize="0"/>
           <p:nvPr/>
         </p:nvPicPr>
@@ -8100,7 +8152,7 @@
       </p:pic>
       <p:sp>
         <p:nvSpPr>
-          <p:cNvPr id="116" name="Google Shape;116;p19"/>
+          <p:cNvPr id="117" name="Google Shape;117;p19"/>
           <p:cNvSpPr txBox="1"/>
           <p:nvPr/>
         </p:nvSpPr>
@@ -8182,7 +8234,7 @@
       </p:sp>
       <p:sp>
         <p:nvSpPr>
-          <p:cNvPr id="117" name="Google Shape;117;p19"/>
+          <p:cNvPr id="118" name="Google Shape;118;p19"/>
           <p:cNvSpPr txBox="1"/>
           <p:nvPr/>
         </p:nvSpPr>
@@ -8240,7 +8292,7 @@
       </p:sp>
       <p:sp>
         <p:nvSpPr>
-          <p:cNvPr id="118" name="Google Shape;118;p19"/>
+          <p:cNvPr id="119" name="Google Shape;119;p19"/>
           <p:cNvSpPr txBox="1"/>
           <p:nvPr/>
         </p:nvSpPr>
@@ -8310,7 +8362,7 @@
       </p:sp>
       <p:sp>
         <p:nvSpPr>
-          <p:cNvPr id="119" name="Google Shape;119;p19"/>
+          <p:cNvPr id="120" name="Google Shape;120;p19"/>
           <p:cNvSpPr txBox="1"/>
           <p:nvPr/>
         </p:nvSpPr>
